--- a/dist/초5/영어/말하기와쓰기/초5_영어_말하기와쓰기_02_지난일말하기.pptx
+++ b/dist/초5/영어/말하기와쓰기/초5_영어_말하기와쓰기_02_지난일말하기.pptx
@@ -122,13 +122,13 @@
   <p:extLst>
     <p:ext uri="{521415D9-36F7-43E2-AB2F-B90AF26B5E84}">
       <p14:sectionLst xmlns:p14="http://schemas.microsoft.com/office/powerpoint/2010/main">
-        <p14:section name="도입" id="{feb28302-3e2b-db81-dbf9-56f31dc84dfb}">
+        <p14:section name="도입" id="{8b3b8a80-07dd-1b83-89cc-f861f1697dc4}">
           <p14:sldIdLst>
             <p14:sldId id="256"/>
             <p14:sldId id="257"/>
           </p14:sldIdLst>
         </p14:section>
-        <p14:section name="개념" id="{745c04d0-0fd2-c3c0-9df9-adc1264721f2}">
+        <p14:section name="개념" id="{c52735aa-4b00-c39c-64a6-9c1e26e9d59d}">
           <p14:sldIdLst>
             <p14:sldId id="258"/>
             <p14:sldId id="259"/>
@@ -137,7 +137,7 @@
             <p14:sldId id="264"/>
           </p14:sldIdLst>
         </p14:section>
-        <p14:section name="연습" id="{db291301-c347-79f5-968e-6c6dac7bfe43}">
+        <p14:section name="연습" id="{00d8eb4a-ff3a-3cc6-4c9d-85adcf49edb6}">
           <p14:sldIdLst>
             <p14:sldId id="262"/>
             <p14:sldId id="263"/>
@@ -145,25 +145,25 @@
             <p14:sldId id="266"/>
           </p14:sldIdLst>
         </p14:section>
-        <p14:section name="개념" id="{94ab7fc7-964c-d684-5554-a3d13beb821a}">
+        <p14:section name="개념" id="{4d9893b6-1b24-698c-e169-0bf378c32890}">
           <p14:sldIdLst/>
         </p14:section>
-        <p14:section name="연습" id="{e7c03609-b4e7-bdcc-11f1-656a0adc20e6}">
+        <p14:section name="연습" id="{b4998598-e635-5e25-215e-c3e7e36ebf7c}">
           <p14:sldIdLst/>
         </p14:section>
-        <p14:section name="확인" id="{c2a244bf-5c9f-658f-da53-89f6c59e65c7}">
+        <p14:section name="확인" id="{cca22bd8-8707-2841-699b-fd48d7b87a33}">
           <p14:sldIdLst>
             <p14:sldId id="267"/>
             <p14:sldId id="268"/>
             <p14:sldId id="269"/>
           </p14:sldIdLst>
         </p14:section>
-        <p14:section name="정리" id="{ed777eca-85aa-ea30-0515-ddc2480f25db}">
+        <p14:section name="정리" id="{c50051ca-1ef6-5c63-9489-ef06c338c887}">
           <p14:sldIdLst>
             <p14:sldId id="270"/>
           </p14:sldIdLst>
         </p14:section>
-        <p14:section name="보충" id="{9a5e5f55-e40b-0fec-1532-1c1e731a11e3}">
+        <p14:section name="보충" id="{cb3ec80c-7a56-70f0-9ee9-f7965c4a3ccf}">
           <p14:sldIdLst>
             <p14:sldId id="271"/>
           </p14:sldIdLst>
